--- a/기획/솔라테라/Solatera 열기 시스템 역기획서-윤정근.pptx
+++ b/기획/솔라테라/Solatera 열기 시스템 역기획서-윤정근.pptx
@@ -314,7 +314,7 @@
           <a:p>
             <a:fld id="{4E9214C1-2863-45BA-A7C5-D5EA3C3D4C30}" type="datetimeFigureOut">
               <a:rPr lang="ko-KR" altLang="en-US" smtClean="0"/>
-              <a:t>2025-04-30</a:t>
+              <a:t>2025-06-17</a:t>
             </a:fld>
             <a:endParaRPr lang="ko-KR" altLang="en-US"/>
           </a:p>
@@ -479,7 +479,7 @@
           <a:p>
             <a:fld id="{8F563C85-90F6-445D-9B5B-8ABB00FB3043}" type="datetimeFigureOut">
               <a:rPr lang="ko-KR" altLang="en-US" smtClean="0"/>
-              <a:t>2025-04-30</a:t>
+              <a:t>2025-06-16</a:t>
             </a:fld>
             <a:endParaRPr lang="ko-KR" altLang="en-US"/>
           </a:p>
@@ -970,7 +970,7 @@
             </a:pPr>
             <a:fld id="{B9320F77-B9A0-41C5-862A-B4B631284C64}" type="datetime1">
               <a:rPr lang="en-GB" altLang="en-US"/>
-              <a:t>30/04/2025</a:t>
+              <a:t>16/06/2025</a:t>
             </a:fld>
             <a:endParaRPr lang="ko-KR" altLang="en-US"/>
           </a:p>
@@ -1170,7 +1170,7 @@
             </a:pPr>
             <a:fld id="{B9320F77-B9A0-41C5-862A-B4B631284C64}" type="datetime1">
               <a:rPr lang="en-GB" altLang="en-US"/>
-              <a:t>30/04/2025</a:t>
+              <a:t>16/06/2025</a:t>
             </a:fld>
             <a:endParaRPr lang="ko-KR" altLang="en-US"/>
           </a:p>
@@ -1370,7 +1370,7 @@
             </a:pPr>
             <a:fld id="{B9320F77-B9A0-41C5-862A-B4B631284C64}" type="datetime1">
               <a:rPr lang="en-GB" altLang="en-US"/>
-              <a:t>30/04/2025</a:t>
+              <a:t>16/06/2025</a:t>
             </a:fld>
             <a:endParaRPr lang="ko-KR" altLang="en-US"/>
           </a:p>
@@ -1570,7 +1570,7 @@
             </a:pPr>
             <a:fld id="{B9320F77-B9A0-41C5-862A-B4B631284C64}" type="datetime1">
               <a:rPr lang="en-GB" altLang="en-US"/>
-              <a:t>30/04/2025</a:t>
+              <a:t>16/06/2025</a:t>
             </a:fld>
             <a:endParaRPr lang="ko-KR" altLang="en-US"/>
           </a:p>
@@ -1836,7 +1836,7 @@
             </a:pPr>
             <a:fld id="{B9320F77-B9A0-41C5-862A-B4B631284C64}" type="datetime1">
               <a:rPr lang="en-GB" altLang="en-US"/>
-              <a:t>30/04/2025</a:t>
+              <a:t>16/06/2025</a:t>
             </a:fld>
             <a:endParaRPr lang="ko-KR" altLang="en-US"/>
           </a:p>
@@ -2092,7 +2092,7 @@
             </a:pPr>
             <a:fld id="{B9320F77-B9A0-41C5-862A-B4B631284C64}" type="datetime1">
               <a:rPr lang="en-GB" altLang="en-US"/>
-              <a:t>30/04/2025</a:t>
+              <a:t>16/06/2025</a:t>
             </a:fld>
             <a:endParaRPr lang="ko-KR" altLang="en-US"/>
           </a:p>
@@ -2478,7 +2478,7 @@
             </a:pPr>
             <a:fld id="{B9320F77-B9A0-41C5-862A-B4B631284C64}" type="datetime1">
               <a:rPr lang="en-GB" altLang="en-US"/>
-              <a:t>30/04/2025</a:t>
+              <a:t>16/06/2025</a:t>
             </a:fld>
             <a:endParaRPr lang="ko-KR" altLang="en-US"/>
           </a:p>
@@ -2622,7 +2622,7 @@
             </a:pPr>
             <a:fld id="{B9320F77-B9A0-41C5-862A-B4B631284C64}" type="datetime1">
               <a:rPr lang="en-GB" altLang="en-US"/>
-              <a:t>30/04/2025</a:t>
+              <a:t>16/06/2025</a:t>
             </a:fld>
             <a:endParaRPr lang="ko-KR" altLang="en-US"/>
           </a:p>
@@ -2739,7 +2739,7 @@
             </a:pPr>
             <a:fld id="{B9320F77-B9A0-41C5-862A-B4B631284C64}" type="datetime1">
               <a:rPr lang="en-GB" altLang="en-US"/>
-              <a:t>30/04/2025</a:t>
+              <a:t>16/06/2025</a:t>
             </a:fld>
             <a:endParaRPr lang="ko-KR" altLang="en-US"/>
           </a:p>
@@ -3036,7 +3036,7 @@
             </a:pPr>
             <a:fld id="{B9320F77-B9A0-41C5-862A-B4B631284C64}" type="datetime1">
               <a:rPr lang="en-GB" altLang="en-US"/>
-              <a:t>30/04/2025</a:t>
+              <a:t>16/06/2025</a:t>
             </a:fld>
             <a:endParaRPr lang="ko-KR" altLang="en-US"/>
           </a:p>
@@ -3310,7 +3310,7 @@
             </a:pPr>
             <a:fld id="{B9320F77-B9A0-41C5-862A-B4B631284C64}" type="datetime1">
               <a:rPr lang="en-GB" altLang="en-US"/>
-              <a:t>30/04/2025</a:t>
+              <a:t>16/06/2025</a:t>
             </a:fld>
             <a:endParaRPr lang="ko-KR" altLang="en-US"/>
           </a:p>
@@ -3540,7 +3540,7 @@
             </a:pPr>
             <a:fld id="{B9320F77-B9A0-41C5-862A-B4B631284C64}" type="datetime1">
               <a:rPr lang="en-GB" altLang="en-US"/>
-              <a:t>30/04/2025</a:t>
+              <a:t>16/06/2025</a:t>
             </a:fld>
             <a:endParaRPr lang="ko-KR" altLang="en-US"/>
           </a:p>
